--- a/assets/powerpoints/module-n2-secretaire/B2-les-etages-et-l-horaire.pptx
+++ b/assets/powerpoints/module-n2-secretaire/B2-les-etages-et-l-horaire.pptx
@@ -12720,7 +12720,61 @@
                 </a:solidFill>
                 <a:latin typeface="Verdana"/>
               </a:rPr>
-              <a:t>Trois choses à noter, et rien d'autre : le &lt;b&gt;papier&lt;/b&gt; demandé, le &lt;b&gt;jour&lt;/b&gt;, l'&lt;b&gt;heure&lt;/b&gt;. Trois mots dans un carnet valent mieux qu'une bonne mémoire, et personne au comptoir ne trouve ça impoli.</a:t>
+              <a:t>Trois choses à noter, et rien d'autre : le </a:t>
+            </a:r>
+            <a:r>
+              <a:rPr sz="2000" b="1" i="0">
+                <a:solidFill>
+                  <a:srgbClr val="4B4F52"/>
+                </a:solidFill>
+                <a:latin typeface="Verdana"/>
+              </a:rPr>
+              <a:t>papier</a:t>
+            </a:r>
+            <a:r>
+              <a:rPr sz="2000" b="0" i="0">
+                <a:solidFill>
+                  <a:srgbClr val="4B4F52"/>
+                </a:solidFill>
+                <a:latin typeface="Verdana"/>
+              </a:rPr>
+              <a:t> demandé, le </a:t>
+            </a:r>
+            <a:r>
+              <a:rPr sz="2000" b="1" i="0">
+                <a:solidFill>
+                  <a:srgbClr val="4B4F52"/>
+                </a:solidFill>
+                <a:latin typeface="Verdana"/>
+              </a:rPr>
+              <a:t>jour</a:t>
+            </a:r>
+            <a:r>
+              <a:rPr sz="2000" b="0" i="0">
+                <a:solidFill>
+                  <a:srgbClr val="4B4F52"/>
+                </a:solidFill>
+                <a:latin typeface="Verdana"/>
+              </a:rPr>
+              <a:t>, l'</a:t>
+            </a:r>
+            <a:r>
+              <a:rPr sz="2000" b="1" i="0">
+                <a:solidFill>
+                  <a:srgbClr val="4B4F52"/>
+                </a:solidFill>
+                <a:latin typeface="Verdana"/>
+              </a:rPr>
+              <a:t>heure</a:t>
+            </a:r>
+            <a:r>
+              <a:rPr sz="2000" b="0" i="0">
+                <a:solidFill>
+                  <a:srgbClr val="4B4F52"/>
+                </a:solidFill>
+                <a:latin typeface="Verdana"/>
+              </a:rPr>
+              <a:t>. Trois mots dans un carnet valent mieux qu'une bonne mémoire, et personne au comptoir ne trouve ça impoli.</a:t>
             </a:r>
           </a:p>
         </p:txBody>
